--- a/courses/build/mentor-3day/M-D1.pptx
+++ b/courses/build/mentor-3day/M-D1.pptx
@@ -4693,7 +4693,7 @@
     <p:bg>
       <p:bgPr>
         <a:solidFill>
-          <a:srgbClr val="1F4D2B"/>
+          <a:srgbClr val="2E3440"/>
         </a:solidFill>
         <a:effectLst/>
       </p:bgPr>
@@ -4735,9 +4735,9 @@
             <a:r>
               <a:rPr sz="1000" b="0">
                 <a:solidFill>
-                  <a:srgbClr val="A8D88A"/>
-                </a:solidFill>
-                <a:latin typeface="Arial"/>
+                  <a:srgbClr val="FAF7F0"/>
+                </a:solidFill>
+                <a:latin typeface="Calibri"/>
               </a:rPr>
               <a:t>M-D1-01</a:t>
             </a:r>
@@ -4774,9 +4774,9 @@
             <a:r>
               <a:rPr sz="1000" b="0">
                 <a:solidFill>
-                  <a:srgbClr val="A8D88A"/>
-                </a:solidFill>
-                <a:latin typeface="Arial"/>
+                  <a:srgbClr val="FAF7F0"/>
+                </a:solidFill>
+                <a:latin typeface="Calibri"/>
               </a:rPr>
               <a:t>Walking With Farmers</a:t>
             </a:r>
@@ -4813,7 +4813,7 @@
             <a:r>
               <a:rPr sz="4800" b="1">
                 <a:solidFill>
-                  <a:srgbClr val="F7F2E9"/>
+                  <a:srgbClr val="FAF7F0"/>
                 </a:solidFill>
                 <a:latin typeface="Georgia"/>
               </a:rPr>
@@ -4837,7 +4837,7 @@
             <a:avLst/>
           </a:prstGeom>
           <a:solidFill>
-            <a:srgbClr val="C07A1E"/>
+            <a:srgbClr val="D9622B"/>
           </a:solidFill>
           <a:ln>
             <a:noFill/>
@@ -4896,9 +4896,9 @@
             <a:r>
               <a:rPr sz="2400" b="0">
                 <a:solidFill>
-                  <a:srgbClr val="A8D88A"/>
-                </a:solidFill>
-                <a:latin typeface="Arial"/>
+                  <a:srgbClr val="FAF7F0"/>
+                </a:solidFill>
+                <a:latin typeface="Calibri"/>
               </a:rPr>
               <a:t>Walking With Farmers</a:t>
             </a:r>
@@ -4912,9 +4912,9 @@
             <a:r>
               <a:rPr sz="2400" b="0">
                 <a:solidFill>
-                  <a:srgbClr val="A8D88A"/>
-                </a:solidFill>
-                <a:latin typeface="Arial"/>
+                  <a:srgbClr val="FAF7F0"/>
+                </a:solidFill>
+                <a:latin typeface="Calibri"/>
               </a:rPr>
               <a:t>Day 1 of 3: listen, ask, coach</a:t>
             </a:r>
@@ -4936,11 +4936,11 @@
             <a:avLst/>
           </a:prstGeom>
           <a:solidFill>
-            <a:srgbClr val="FBF6EC"/>
+            <a:srgbClr val="FAF7F0"/>
           </a:solidFill>
           <a:ln w="15875">
             <a:solidFill>
-              <a:srgbClr val="E2D8C4"/>
+              <a:srgbClr val="6E9CC4"/>
             </a:solidFill>
           </a:ln>
           <a:effectLst/>
@@ -4997,9 +4997,9 @@
             <a:r>
               <a:rPr sz="1200" b="1">
                 <a:solidFill>
-                  <a:srgbClr val="C07A1E"/>
-                </a:solidFill>
-                <a:latin typeface="Arial"/>
+                  <a:srgbClr val="D9622B"/>
+                </a:solidFill>
+                <a:latin typeface="Calibri"/>
               </a:rPr>
               <a:t>IMAGE · M-IMG-01 · coming</a:t>
             </a:r>
@@ -5036,7 +5036,7 @@
             <a:r>
               <a:rPr sz="1800" b="1">
                 <a:solidFill>
-                  <a:srgbClr val="1F4D2B"/>
+                  <a:srgbClr val="232323"/>
                 </a:solidFill>
                 <a:latin typeface="Georgia"/>
               </a:rPr>
@@ -5075,9 +5075,9 @@
             <a:r>
               <a:rPr sz="1100" b="0">
                 <a:solidFill>
-                  <a:srgbClr val="20190F"/>
-                </a:solidFill>
-                <a:latin typeface="Arial"/>
+                  <a:srgbClr val="232323"/>
+                </a:solidFill>
+                <a:latin typeface="Calibri"/>
               </a:rPr>
               <a:t>Cover image for all decks. Early morning; the mentor greets the farmer at a wire-and- dropper garden gate, both smiling, a vegetable garden behind with mulched beds and a JoJo-style tank beside a corrugated-iron roof. Sun low in the north-east, long shadows falling south-west. 16:9, 1920 × 1080, space on the left third for the slide title.</a:t>
             </a:r>
@@ -5098,7 +5098,7 @@
     <p:bg>
       <p:bgPr>
         <a:solidFill>
-          <a:srgbClr val="F7F2E9"/>
+          <a:srgbClr val="FAF7F0"/>
         </a:solidFill>
         <a:effectLst/>
       </p:bgPr>
@@ -5140,9 +5140,9 @@
             <a:r>
               <a:rPr sz="1000" b="0">
                 <a:solidFill>
-                  <a:srgbClr val="6B6255"/>
-                </a:solidFill>
-                <a:latin typeface="Arial"/>
+                  <a:srgbClr val="232323"/>
+                </a:solidFill>
+                <a:latin typeface="Calibri"/>
               </a:rPr>
               <a:t>M-D1-10   ·   Poster M-P04</a:t>
             </a:r>
@@ -5179,9 +5179,9 @@
             <a:r>
               <a:rPr sz="1000" b="0">
                 <a:solidFill>
-                  <a:srgbClr val="6B6255"/>
-                </a:solidFill>
-                <a:latin typeface="Arial"/>
+                  <a:srgbClr val="232323"/>
+                </a:solidFill>
+                <a:latin typeface="Calibri"/>
               </a:rPr>
               <a:t>Walking With Farmers</a:t>
             </a:r>
@@ -5203,7 +5203,7 @@
             <a:avLst/>
           </a:prstGeom>
           <a:solidFill>
-            <a:srgbClr val="C07A1E"/>
+            <a:srgbClr val="D9622B"/>
           </a:solidFill>
           <a:ln>
             <a:noFill/>
@@ -5262,9 +5262,9 @@
             <a:r>
               <a:rPr sz="1400" b="1">
                 <a:solidFill>
-                  <a:srgbClr val="F7F2E9"/>
-                </a:solidFill>
-                <a:latin typeface="Arial"/>
+                  <a:srgbClr val="FAF7F0"/>
+                </a:solidFill>
+                <a:latin typeface="Calibri"/>
               </a:rPr>
               <a:t>YOUR TURN</a:t>
             </a:r>
@@ -5301,7 +5301,7 @@
             <a:r>
               <a:rPr sz="3800" b="1">
                 <a:solidFill>
-                  <a:srgbClr val="1F4D2B"/>
+                  <a:srgbClr val="232323"/>
                 </a:solidFill>
                 <a:latin typeface="Georgia"/>
               </a:rPr>
@@ -5325,7 +5325,7 @@
             <a:avLst/>
           </a:prstGeom>
           <a:solidFill>
-            <a:srgbClr val="E2D8C4"/>
+            <a:srgbClr val="6E9CC4"/>
           </a:solidFill>
           <a:ln>
             <a:noFill/>
@@ -5384,9 +5384,9 @@
             <a:r>
               <a:rPr sz="3000" b="1">
                 <a:solidFill>
-                  <a:srgbClr val="20190F"/>
-                </a:solidFill>
-                <a:latin typeface="Arial"/>
+                  <a:srgbClr val="232323"/>
+                </a:solidFill>
+                <a:latin typeface="Calibri"/>
               </a:rPr>
               <a:t>•  Fishbowl: two openings</a:t>
             </a:r>
@@ -5400,9 +5400,9 @@
             <a:r>
               <a:rPr sz="3000" b="1">
                 <a:solidFill>
-                  <a:srgbClr val="20190F"/>
-                </a:solidFill>
-                <a:latin typeface="Arial"/>
+                  <a:srgbClr val="232323"/>
+                </a:solidFill>
+                <a:latin typeface="Calibri"/>
               </a:rPr>
               <a:t>•  "What problems do you have?"</a:t>
             </a:r>
@@ -5416,9 +5416,9 @@
             <a:r>
               <a:rPr sz="3000" b="1">
                 <a:solidFill>
-                  <a:srgbClr val="20190F"/>
-                </a:solidFill>
-                <a:latin typeface="Arial"/>
+                  <a:srgbClr val="232323"/>
+                </a:solidFill>
+                <a:latin typeface="Calibri"/>
               </a:rPr>
               <a:t>•  "What are you proud of?"</a:t>
             </a:r>
@@ -5439,7 +5439,7 @@
     <p:bg>
       <p:bgPr>
         <a:solidFill>
-          <a:srgbClr val="F7F2E9"/>
+          <a:srgbClr val="FAF7F0"/>
         </a:solidFill>
         <a:effectLst/>
       </p:bgPr>
@@ -5481,9 +5481,9 @@
             <a:r>
               <a:rPr sz="1000" b="0">
                 <a:solidFill>
-                  <a:srgbClr val="6B6255"/>
-                </a:solidFill>
-                <a:latin typeface="Arial"/>
+                  <a:srgbClr val="232323"/>
+                </a:solidFill>
+                <a:latin typeface="Calibri"/>
               </a:rPr>
               <a:t>M-D1-11   ·   Poster M-P05</a:t>
             </a:r>
@@ -5520,9 +5520,9 @@
             <a:r>
               <a:rPr sz="1000" b="0">
                 <a:solidFill>
-                  <a:srgbClr val="6B6255"/>
-                </a:solidFill>
-                <a:latin typeface="Arial"/>
+                  <a:srgbClr val="232323"/>
+                </a:solidFill>
+                <a:latin typeface="Calibri"/>
               </a:rPr>
               <a:t>Walking With Farmers</a:t>
             </a:r>
@@ -5559,7 +5559,7 @@
             <a:r>
               <a:rPr sz="3800" b="1">
                 <a:solidFill>
-                  <a:srgbClr val="1F4D2B"/>
+                  <a:srgbClr val="232323"/>
                 </a:solidFill>
                 <a:latin typeface="Georgia"/>
               </a:rPr>
@@ -5583,7 +5583,7 @@
             <a:avLst/>
           </a:prstGeom>
           <a:solidFill>
-            <a:srgbClr val="E2D8C4"/>
+            <a:srgbClr val="6E9CC4"/>
           </a:solidFill>
           <a:ln>
             <a:noFill/>
@@ -5642,9 +5642,9 @@
             <a:r>
               <a:rPr sz="2400" b="0">
                 <a:solidFill>
-                  <a:srgbClr val="20190F"/>
-                </a:solidFill>
-                <a:latin typeface="Arial"/>
+                  <a:srgbClr val="232323"/>
+                </a:solidFill>
+                <a:latin typeface="Calibri"/>
               </a:rPr>
               <a:t>•  I do: show once, slowly</a:t>
             </a:r>
@@ -5658,9 +5658,9 @@
             <a:r>
               <a:rPr sz="2400" b="0">
                 <a:solidFill>
-                  <a:srgbClr val="20190F"/>
-                </a:solidFill>
-                <a:latin typeface="Arial"/>
+                  <a:srgbClr val="232323"/>
+                </a:solidFill>
+                <a:latin typeface="Calibri"/>
               </a:rPr>
               <a:t>•  We do: the farmer's hands</a:t>
             </a:r>
@@ -5674,9 +5674,9 @@
             <a:r>
               <a:rPr sz="2400" b="0">
                 <a:solidFill>
-                  <a:srgbClr val="20190F"/>
-                </a:solidFill>
-                <a:latin typeface="Arial"/>
+                  <a:srgbClr val="232323"/>
+                </a:solidFill>
+                <a:latin typeface="Calibri"/>
               </a:rPr>
               <a:t>•  You do: watch quietly · then talk</a:t>
             </a:r>
@@ -5698,11 +5698,11 @@
             <a:avLst/>
           </a:prstGeom>
           <a:solidFill>
-            <a:srgbClr val="FBF6EC"/>
+            <a:srgbClr val="FAF7F0"/>
           </a:solidFill>
           <a:ln w="15875">
             <a:solidFill>
-              <a:srgbClr val="E2D8C4"/>
+              <a:srgbClr val="6E9CC4"/>
             </a:solidFill>
           </a:ln>
           <a:effectLst/>
@@ -5759,9 +5759,9 @@
             <a:r>
               <a:rPr sz="1200" b="1">
                 <a:solidFill>
-                  <a:srgbClr val="C07A1E"/>
-                </a:solidFill>
-                <a:latin typeface="Arial"/>
+                  <a:srgbClr val="D9622B"/>
+                </a:solidFill>
+                <a:latin typeface="Calibri"/>
               </a:rPr>
               <a:t>POSTER ART · M-P05-ART · coming</a:t>
             </a:r>
@@ -5798,7 +5798,7 @@
             <a:r>
               <a:rPr sz="1800" b="1">
                 <a:solidFill>
-                  <a:srgbClr val="1F4D2B"/>
+                  <a:srgbClr val="232323"/>
                 </a:solidFill>
                 <a:latin typeface="Georgia"/>
               </a:rPr>
@@ -5837,9 +5837,9 @@
             <a:r>
               <a:rPr sz="1100" b="0">
                 <a:solidFill>
-                  <a:srgbClr val="20190F"/>
-                </a:solidFill>
-                <a:latin typeface="Arial"/>
+                  <a:srgbClr val="232323"/>
+                </a:solidFill>
+                <a:latin typeface="Calibri"/>
               </a:rPr>
               <a:t>Three panels left to right on one strip of garden, the same pair each time, laying a knotted spacing string along a bed and planting seedlings. Panel 1: mentor plants, farmer watches. Panel 2: both kneeling, the farmer's hands on the seedling, the mentor's hand guiding. Panel 3: the farmer planting alone; the mentor standing back with hands in pockets,…</a:t>
             </a:r>
@@ -5860,7 +5860,7 @@
     <p:bg>
       <p:bgPr>
         <a:solidFill>
-          <a:srgbClr val="F7F2E9"/>
+          <a:srgbClr val="FAF7F0"/>
         </a:solidFill>
         <a:effectLst/>
       </p:bgPr>
@@ -5902,9 +5902,9 @@
             <a:r>
               <a:rPr sz="1000" b="0">
                 <a:solidFill>
-                  <a:srgbClr val="6B6255"/>
-                </a:solidFill>
-                <a:latin typeface="Arial"/>
+                  <a:srgbClr val="232323"/>
+                </a:solidFill>
+                <a:latin typeface="Calibri"/>
               </a:rPr>
               <a:t>M-D1-12   ·   Poster F-P06</a:t>
             </a:r>
@@ -5941,9 +5941,9 @@
             <a:r>
               <a:rPr sz="1000" b="0">
                 <a:solidFill>
-                  <a:srgbClr val="6B6255"/>
-                </a:solidFill>
-                <a:latin typeface="Arial"/>
+                  <a:srgbClr val="232323"/>
+                </a:solidFill>
+                <a:latin typeface="Calibri"/>
               </a:rPr>
               <a:t>Walking With Farmers</a:t>
             </a:r>
@@ -5965,7 +5965,7 @@
             <a:avLst/>
           </a:prstGeom>
           <a:solidFill>
-            <a:srgbClr val="C07A1E"/>
+            <a:srgbClr val="D9622B"/>
           </a:solidFill>
           <a:ln>
             <a:noFill/>
@@ -6024,9 +6024,9 @@
             <a:r>
               <a:rPr sz="1400" b="1">
                 <a:solidFill>
-                  <a:srgbClr val="F7F2E9"/>
-                </a:solidFill>
-                <a:latin typeface="Arial"/>
+                  <a:srgbClr val="FAF7F0"/>
+                </a:solidFill>
+                <a:latin typeface="Calibri"/>
               </a:rPr>
               <a:t>YOUR TURN</a:t>
             </a:r>
@@ -6063,7 +6063,7 @@
             <a:r>
               <a:rPr sz="3800" b="1">
                 <a:solidFill>
-                  <a:srgbClr val="1F4D2B"/>
+                  <a:srgbClr val="232323"/>
                 </a:solidFill>
                 <a:latin typeface="Georgia"/>
               </a:rPr>
@@ -6087,7 +6087,7 @@
             <a:avLst/>
           </a:prstGeom>
           <a:solidFill>
-            <a:srgbClr val="E2D8C4"/>
+            <a:srgbClr val="6E9CC4"/>
           </a:solidFill>
           <a:ln>
             <a:noFill/>
@@ -6146,9 +6146,9 @@
             <a:r>
               <a:rPr sz="2600" b="1">
                 <a:solidFill>
-                  <a:srgbClr val="20190F"/>
-                </a:solidFill>
-                <a:latin typeface="Arial"/>
+                  <a:srgbClr val="232323"/>
+                </a:solidFill>
+                <a:latin typeface="Calibri"/>
               </a:rPr>
               <a:t>•  Coach · Farmer · 3 Observers</a:t>
             </a:r>
@@ -6162,9 +6162,9 @@
             <a:r>
               <a:rPr sz="2600" b="1">
                 <a:solidFill>
-                  <a:srgbClr val="20190F"/>
-                </a:solidFill>
-                <a:latin typeface="Arial"/>
+                  <a:srgbClr val="232323"/>
+                </a:solidFill>
+                <a:latin typeface="Calibri"/>
               </a:rPr>
               <a:t>•  12 min coaching + 3 min feedback</a:t>
             </a:r>
@@ -6178,9 +6178,9 @@
             <a:r>
               <a:rPr sz="2600" b="1">
                 <a:solidFill>
-                  <a:srgbClr val="20190F"/>
-                </a:solidFill>
-                <a:latin typeface="Arial"/>
+                  <a:srgbClr val="232323"/>
+                </a:solidFill>
+                <a:latin typeface="Calibri"/>
               </a:rPr>
               <a:t>•  Two rounds</a:t>
             </a:r>
@@ -6226,7 +6226,7 @@
             <a:avLst/>
           </a:prstGeom>
           <a:solidFill>
-            <a:srgbClr val="20190F"/>
+            <a:srgbClr val="232323"/>
           </a:solidFill>
           <a:ln>
             <a:noFill/>
@@ -6285,9 +6285,9 @@
             <a:r>
               <a:rPr sz="1100" b="0">
                 <a:solidFill>
-                  <a:srgbClr val="F7F2E9"/>
-                </a:solidFill>
-                <a:latin typeface="Arial"/>
+                  <a:srgbClr val="FAF7F0"/>
+                </a:solidFill>
+                <a:latin typeface="Calibri"/>
               </a:rPr>
               <a:t>▶  Clip M-ANI-03 · play from the tablet: flow-a-frame.mp4</a:t>
             </a:r>
@@ -6308,7 +6308,7 @@
     <p:bg>
       <p:bgPr>
         <a:solidFill>
-          <a:srgbClr val="F7F2E9"/>
+          <a:srgbClr val="FAF7F0"/>
         </a:solidFill>
         <a:effectLst/>
       </p:bgPr>
@@ -6350,9 +6350,9 @@
             <a:r>
               <a:rPr sz="1000" b="0">
                 <a:solidFill>
-                  <a:srgbClr val="6B6255"/>
-                </a:solidFill>
-                <a:latin typeface="Arial"/>
+                  <a:srgbClr val="232323"/>
+                </a:solidFill>
+                <a:latin typeface="Calibri"/>
               </a:rPr>
               <a:t>M-D1-13   ·   Poster M-P05</a:t>
             </a:r>
@@ -6389,9 +6389,9 @@
             <a:r>
               <a:rPr sz="1000" b="0">
                 <a:solidFill>
-                  <a:srgbClr val="6B6255"/>
-                </a:solidFill>
-                <a:latin typeface="Arial"/>
+                  <a:srgbClr val="232323"/>
+                </a:solidFill>
+                <a:latin typeface="Calibri"/>
               </a:rPr>
               <a:t>Walking With Farmers</a:t>
             </a:r>
@@ -6428,7 +6428,7 @@
             <a:r>
               <a:rPr sz="3800" b="1">
                 <a:solidFill>
-                  <a:srgbClr val="1F4D2B"/>
+                  <a:srgbClr val="232323"/>
                 </a:solidFill>
                 <a:latin typeface="Georgia"/>
               </a:rPr>
@@ -6452,7 +6452,7 @@
             <a:avLst/>
           </a:prstGeom>
           <a:solidFill>
-            <a:srgbClr val="E2D8C4"/>
+            <a:srgbClr val="6E9CC4"/>
           </a:solidFill>
           <a:ln>
             <a:noFill/>
@@ -6511,9 +6511,9 @@
             <a:r>
               <a:rPr sz="2800" b="0">
                 <a:solidFill>
-                  <a:srgbClr val="20190F"/>
-                </a:solidFill>
-                <a:latin typeface="Arial"/>
+                  <a:srgbClr val="232323"/>
+                </a:solidFill>
+                <a:latin typeface="Calibri"/>
               </a:rPr>
               <a:t>•  Alone and correct = Demonstrated</a:t>
             </a:r>
@@ -6527,9 +6527,9 @@
             <a:r>
               <a:rPr sz="2800" b="0">
                 <a:solidFill>
-                  <a:srgbClr val="20190F"/>
-                </a:solidFill>
-                <a:latin typeface="Arial"/>
+                  <a:srgbClr val="232323"/>
+                </a:solidFill>
+                <a:latin typeface="Calibri"/>
               </a:rPr>
               <a:t>•  With help = Needs further support</a:t>
             </a:r>
@@ -6543,9 +6543,9 @@
             <a:r>
               <a:rPr sz="2800" b="0">
                 <a:solidFill>
-                  <a:srgbClr val="20190F"/>
-                </a:solidFill>
-                <a:latin typeface="Arial"/>
+                  <a:srgbClr val="232323"/>
+                </a:solidFill>
+                <a:latin typeface="Calibri"/>
               </a:rPr>
               <a:t>•  Not a failure: the next plan</a:t>
             </a:r>
@@ -6566,7 +6566,7 @@
     <p:bg>
       <p:bgPr>
         <a:solidFill>
-          <a:srgbClr val="F7F2E9"/>
+          <a:srgbClr val="FAF7F0"/>
         </a:solidFill>
         <a:effectLst/>
       </p:bgPr>
@@ -6608,9 +6608,9 @@
             <a:r>
               <a:rPr sz="1000" b="0">
                 <a:solidFill>
-                  <a:srgbClr val="6B6255"/>
-                </a:solidFill>
-                <a:latin typeface="Arial"/>
+                  <a:srgbClr val="232323"/>
+                </a:solidFill>
+                <a:latin typeface="Calibri"/>
               </a:rPr>
               <a:t>M-D1-14   ·   Poster M-P06</a:t>
             </a:r>
@@ -6647,9 +6647,9 @@
             <a:r>
               <a:rPr sz="1000" b="0">
                 <a:solidFill>
-                  <a:srgbClr val="6B6255"/>
-                </a:solidFill>
-                <a:latin typeface="Arial"/>
+                  <a:srgbClr val="232323"/>
+                </a:solidFill>
+                <a:latin typeface="Calibri"/>
               </a:rPr>
               <a:t>Walking With Farmers</a:t>
             </a:r>
@@ -6686,7 +6686,7 @@
             <a:r>
               <a:rPr sz="3800" b="1">
                 <a:solidFill>
-                  <a:srgbClr val="1F4D2B"/>
+                  <a:srgbClr val="232323"/>
                 </a:solidFill>
                 <a:latin typeface="Georgia"/>
               </a:rPr>
@@ -6710,7 +6710,7 @@
             <a:avLst/>
           </a:prstGeom>
           <a:solidFill>
-            <a:srgbClr val="E2D8C4"/>
+            <a:srgbClr val="6E9CC4"/>
           </a:solidFill>
           <a:ln>
             <a:noFill/>
@@ -6769,9 +6769,9 @@
             <a:r>
               <a:rPr sz="2800" b="0">
                 <a:solidFill>
-                  <a:srgbClr val="20190F"/>
-                </a:solidFill>
-                <a:latin typeface="Arial"/>
+                  <a:srgbClr val="232323"/>
+                </a:solidFill>
+                <a:latin typeface="Calibri"/>
               </a:rPr>
               <a:t>•  What? Who?</a:t>
             </a:r>
@@ -6785,9 +6785,9 @@
             <a:r>
               <a:rPr sz="2800" b="0">
                 <a:solidFill>
-                  <a:srgbClr val="20190F"/>
-                </a:solidFill>
-                <a:latin typeface="Arial"/>
+                  <a:srgbClr val="232323"/>
+                </a:solidFill>
+                <a:latin typeface="Calibri"/>
               </a:rPr>
               <a:t>•  By when?</a:t>
             </a:r>
@@ -6801,9 +6801,9 @@
             <a:r>
               <a:rPr sz="2800" b="0">
                 <a:solidFill>
-                  <a:srgbClr val="20190F"/>
-                </a:solidFill>
-                <a:latin typeface="Arial"/>
+                  <a:srgbClr val="232323"/>
+                </a:solidFill>
+                <a:latin typeface="Calibri"/>
               </a:rPr>
               <a:t>•  How will we know?</a:t>
             </a:r>
@@ -6825,11 +6825,11 @@
             <a:avLst/>
           </a:prstGeom>
           <a:solidFill>
-            <a:srgbClr val="FBF6EC"/>
+            <a:srgbClr val="FAF7F0"/>
           </a:solidFill>
           <a:ln w="15875">
             <a:solidFill>
-              <a:srgbClr val="E2D8C4"/>
+              <a:srgbClr val="6E9CC4"/>
             </a:solidFill>
           </a:ln>
           <a:effectLst/>
@@ -6886,9 +6886,9 @@
             <a:r>
               <a:rPr sz="1200" b="1">
                 <a:solidFill>
-                  <a:srgbClr val="C07A1E"/>
-                </a:solidFill>
-                <a:latin typeface="Arial"/>
+                  <a:srgbClr val="D9622B"/>
+                </a:solidFill>
+                <a:latin typeface="Calibri"/>
               </a:rPr>
               <a:t>POSTER ART · M-P06-ART · coming</a:t>
             </a:r>
@@ -6925,7 +6925,7 @@
             <a:r>
               <a:rPr sz="1800" b="1">
                 <a:solidFill>
-                  <a:srgbClr val="1F4D2B"/>
+                  <a:srgbClr val="232323"/>
                 </a:solidFill>
                 <a:latin typeface="Georgia"/>
               </a:rPr>
@@ -6964,9 +6964,9 @@
             <a:r>
               <a:rPr sz="1100" b="0">
                 <a:solidFill>
-                  <a:srgbClr val="20190F"/>
-                </a:solidFill>
-                <a:latin typeface="Arial"/>
+                  <a:srgbClr val="232323"/>
+                </a:solidFill>
+                <a:latin typeface="Calibri"/>
               </a:rPr>
               <a:t>The mentor and farmer shaking hands over a garden bed at the end of a visit. Around them, four corner vignettes: a bundle of dry grass mulch on a bed (what); the farmer's grandson carrying grass (who); a wall calendar with one square circled (by when — no numbers); the same bed later, covered in mulch, with the mentor looking and the farmer pointing (how…</a:t>
             </a:r>
@@ -6987,7 +6987,7 @@
     <p:bg>
       <p:bgPr>
         <a:solidFill>
-          <a:srgbClr val="F7F2E9"/>
+          <a:srgbClr val="FAF7F0"/>
         </a:solidFill>
         <a:effectLst/>
       </p:bgPr>
@@ -7029,9 +7029,9 @@
             <a:r>
               <a:rPr sz="1000" b="0">
                 <a:solidFill>
-                  <a:srgbClr val="6B6255"/>
-                </a:solidFill>
-                <a:latin typeface="Arial"/>
+                  <a:srgbClr val="232323"/>
+                </a:solidFill>
+                <a:latin typeface="Calibri"/>
               </a:rPr>
               <a:t>M-D1-15   ·   Poster M-P16</a:t>
             </a:r>
@@ -7068,9 +7068,9 @@
             <a:r>
               <a:rPr sz="1000" b="0">
                 <a:solidFill>
-                  <a:srgbClr val="6B6255"/>
-                </a:solidFill>
-                <a:latin typeface="Arial"/>
+                  <a:srgbClr val="232323"/>
+                </a:solidFill>
+                <a:latin typeface="Calibri"/>
               </a:rPr>
               <a:t>Walking With Farmers</a:t>
             </a:r>
@@ -7107,7 +7107,7 @@
             <a:r>
               <a:rPr sz="3800" b="1">
                 <a:solidFill>
-                  <a:srgbClr val="1F4D2B"/>
+                  <a:srgbClr val="232323"/>
                 </a:solidFill>
                 <a:latin typeface="Georgia"/>
               </a:rPr>
@@ -7131,7 +7131,7 @@
             <a:avLst/>
           </a:prstGeom>
           <a:solidFill>
-            <a:srgbClr val="E2D8C4"/>
+            <a:srgbClr val="6E9CC4"/>
           </a:solidFill>
           <a:ln>
             <a:noFill/>
@@ -7190,9 +7190,9 @@
             <a:r>
               <a:rPr sz="2800" b="0">
                 <a:solidFill>
-                  <a:srgbClr val="20190F"/>
-                </a:solidFill>
-                <a:latin typeface="Arial"/>
+                  <a:srgbClr val="232323"/>
+                </a:solidFill>
+                <a:latin typeface="Calibri"/>
               </a:rPr>
               <a:t>•  Before · after · the date</a:t>
             </a:r>
@@ -7206,9 +7206,9 @@
             <a:r>
               <a:rPr sz="2800" b="0">
                 <a:solidFill>
-                  <a:srgbClr val="20190F"/>
-                </a:solidFill>
-                <a:latin typeface="Arial"/>
+                  <a:srgbClr val="232323"/>
+                </a:solidFill>
+                <a:latin typeface="Calibri"/>
               </a:rPr>
               <a:t>•  Close only with evidence</a:t>
             </a:r>
@@ -7222,9 +7222,9 @@
             <a:r>
               <a:rPr sz="2800" b="0">
                 <a:solidFill>
-                  <a:srgbClr val="20190F"/>
-                </a:solidFill>
-                <a:latin typeface="Arial"/>
+                  <a:srgbClr val="232323"/>
+                </a:solidFill>
+                <a:latin typeface="Calibri"/>
               </a:rPr>
               <a:t>•  Not done? What got in the way?</a:t>
             </a:r>
@@ -7246,11 +7246,11 @@
             <a:avLst/>
           </a:prstGeom>
           <a:solidFill>
-            <a:srgbClr val="FBF6EC"/>
+            <a:srgbClr val="FAF7F0"/>
           </a:solidFill>
           <a:ln w="15875">
             <a:solidFill>
-              <a:srgbClr val="E2D8C4"/>
+              <a:srgbClr val="6E9CC4"/>
             </a:solidFill>
           </a:ln>
           <a:effectLst/>
@@ -7307,9 +7307,9 @@
             <a:r>
               <a:rPr sz="1200" b="1">
                 <a:solidFill>
-                  <a:srgbClr val="C07A1E"/>
-                </a:solidFill>
-                <a:latin typeface="Arial"/>
+                  <a:srgbClr val="D9622B"/>
+                </a:solidFill>
+                <a:latin typeface="Calibri"/>
               </a:rPr>
               <a:t>POSTER ART · M-P16-ART · coming</a:t>
             </a:r>
@@ -7346,7 +7346,7 @@
             <a:r>
               <a:rPr sz="1800" b="1">
                 <a:solidFill>
-                  <a:srgbClr val="1F4D2B"/>
+                  <a:srgbClr val="232323"/>
                 </a:solidFill>
                 <a:latin typeface="Georgia"/>
               </a:rPr>
@@ -7385,9 +7385,9 @@
             <a:r>
               <a:rPr sz="1100" b="0">
                 <a:solidFill>
-                  <a:srgbClr val="20190F"/>
-                </a:solidFill>
-                <a:latin typeface="Arial"/>
+                  <a:srgbClr val="232323"/>
+                </a:solidFill>
+                <a:latin typeface="Calibri"/>
               </a:rPr>
               <a:t>Two matching views of the same bed from the same spot, side by side: left "before" — bare, cracked soil; right "after" — mulched, planted at even spacing, healthy. Below, the mentor and the farmer look at a notebook together; the farmer points at a line. A small wall-calendar square with a tick. Same fence post in both views so the viewer sees it is the…</a:t>
             </a:r>
@@ -7408,7 +7408,7 @@
     <p:bg>
       <p:bgPr>
         <a:solidFill>
-          <a:srgbClr val="1F4D2B"/>
+          <a:srgbClr val="2E3440"/>
         </a:solidFill>
         <a:effectLst/>
       </p:bgPr>
@@ -7450,9 +7450,9 @@
             <a:r>
               <a:rPr sz="1000" b="0">
                 <a:solidFill>
-                  <a:srgbClr val="A8D88A"/>
-                </a:solidFill>
-                <a:latin typeface="Arial"/>
+                  <a:srgbClr val="FAF7F0"/>
+                </a:solidFill>
+                <a:latin typeface="Calibri"/>
               </a:rPr>
               <a:t>M-D1-16</a:t>
             </a:r>
@@ -7489,9 +7489,9 @@
             <a:r>
               <a:rPr sz="1000" b="0">
                 <a:solidFill>
-                  <a:srgbClr val="A8D88A"/>
-                </a:solidFill>
-                <a:latin typeface="Arial"/>
+                  <a:srgbClr val="FAF7F0"/>
+                </a:solidFill>
+                <a:latin typeface="Calibri"/>
               </a:rPr>
               <a:t>Walking With Farmers</a:t>
             </a:r>
@@ -7528,7 +7528,7 @@
             <a:r>
               <a:rPr sz="4800" b="1">
                 <a:solidFill>
-                  <a:srgbClr val="F7F2E9"/>
+                  <a:srgbClr val="FAF7F0"/>
                 </a:solidFill>
                 <a:latin typeface="Georgia"/>
               </a:rPr>
@@ -7552,7 +7552,7 @@
             <a:avLst/>
           </a:prstGeom>
           <a:solidFill>
-            <a:srgbClr val="C07A1E"/>
+            <a:srgbClr val="D9622B"/>
           </a:solidFill>
           <a:ln>
             <a:noFill/>
@@ -7611,9 +7611,9 @@
             <a:r>
               <a:rPr sz="2400" b="0">
                 <a:solidFill>
-                  <a:srgbClr val="A8D88A"/>
-                </a:solidFill>
-                <a:latin typeface="Arial"/>
+                  <a:srgbClr val="FAF7F0"/>
+                </a:solidFill>
+                <a:latin typeface="Calibri"/>
               </a:rPr>
               <a:t>One word about today</a:t>
             </a:r>
@@ -7627,9 +7627,9 @@
             <a:r>
               <a:rPr sz="2400" b="0">
                 <a:solidFill>
-                  <a:srgbClr val="A8D88A"/>
-                </a:solidFill>
-                <a:latin typeface="Arial"/>
+                  <a:srgbClr val="FAF7F0"/>
+                </a:solidFill>
+                <a:latin typeface="Calibri"/>
               </a:rPr>
               <a:t>Tomorrow: real farms, leave 10:05</a:t>
             </a:r>
@@ -7643,9 +7643,9 @@
             <a:r>
               <a:rPr sz="2400" b="0">
                 <a:solidFill>
-                  <a:srgbClr val="A8D88A"/>
-                </a:solidFill>
-                <a:latin typeface="Arial"/>
+                  <a:srgbClr val="FAF7F0"/>
+                </a:solidFill>
+                <a:latin typeface="Calibri"/>
               </a:rPr>
               <a:t>Closed shoes, hat, water</a:t>
             </a:r>
@@ -7666,7 +7666,7 @@
     <p:bg>
       <p:bgPr>
         <a:solidFill>
-          <a:srgbClr val="F7F2E9"/>
+          <a:srgbClr val="FAF7F0"/>
         </a:solidFill>
         <a:effectLst/>
       </p:bgPr>
@@ -7708,9 +7708,9 @@
             <a:r>
               <a:rPr sz="1000" b="0">
                 <a:solidFill>
-                  <a:srgbClr val="6B6255"/>
-                </a:solidFill>
-                <a:latin typeface="Arial"/>
+                  <a:srgbClr val="232323"/>
+                </a:solidFill>
+                <a:latin typeface="Calibri"/>
               </a:rPr>
               <a:t>M-D1-02   ·   Poster F-P01</a:t>
             </a:r>
@@ -7747,9 +7747,9 @@
             <a:r>
               <a:rPr sz="1000" b="0">
                 <a:solidFill>
-                  <a:srgbClr val="6B6255"/>
-                </a:solidFill>
-                <a:latin typeface="Arial"/>
+                  <a:srgbClr val="232323"/>
+                </a:solidFill>
+                <a:latin typeface="Calibri"/>
               </a:rPr>
               <a:t>Walking With Farmers</a:t>
             </a:r>
@@ -7771,7 +7771,7 @@
             <a:avLst/>
           </a:prstGeom>
           <a:solidFill>
-            <a:srgbClr val="C07A1E"/>
+            <a:srgbClr val="D9622B"/>
           </a:solidFill>
           <a:ln>
             <a:noFill/>
@@ -7830,9 +7830,9 @@
             <a:r>
               <a:rPr sz="1400" b="1">
                 <a:solidFill>
-                  <a:srgbClr val="F7F2E9"/>
-                </a:solidFill>
-                <a:latin typeface="Arial"/>
+                  <a:srgbClr val="FAF7F0"/>
+                </a:solidFill>
+                <a:latin typeface="Calibri"/>
               </a:rPr>
               <a:t>YOUR TURN</a:t>
             </a:r>
@@ -7869,7 +7869,7 @@
             <a:r>
               <a:rPr sz="3800" b="1">
                 <a:solidFill>
-                  <a:srgbClr val="1F4D2B"/>
+                  <a:srgbClr val="232323"/>
                 </a:solidFill>
                 <a:latin typeface="Georgia"/>
               </a:rPr>
@@ -7893,7 +7893,7 @@
             <a:avLst/>
           </a:prstGeom>
           <a:solidFill>
-            <a:srgbClr val="E2D8C4"/>
+            <a:srgbClr val="6E9CC4"/>
           </a:solidFill>
           <a:ln>
             <a:noFill/>
@@ -7952,9 +7952,9 @@
             <a:r>
               <a:rPr sz="3000" b="1">
                 <a:solidFill>
-                  <a:srgbClr val="20190F"/>
-                </a:solidFill>
-                <a:latin typeface="Arial"/>
+                  <a:srgbClr val="232323"/>
+                </a:solidFill>
+                <a:latin typeface="Calibri"/>
               </a:rPr>
               <a:t>•  Groups of 5, named after plants</a:t>
             </a:r>
@@ -7968,9 +7968,9 @@
             <a:r>
               <a:rPr sz="3000" b="1">
                 <a:solidFill>
-                  <a:srgbClr val="20190F"/>
-                </a:solidFill>
-                <a:latin typeface="Arial"/>
+                  <a:srgbClr val="232323"/>
+                </a:solidFill>
+                <a:latin typeface="Calibri"/>
               </a:rPr>
               <a:t>•  Leader · Timekeeper · Materials · Recorder · Reporter</a:t>
             </a:r>
@@ -7984,9 +7984,9 @@
             <a:r>
               <a:rPr sz="3000" b="1">
                 <a:solidFill>
-                  <a:srgbClr val="20190F"/>
-                </a:solidFill>
-                <a:latin typeface="Arial"/>
+                  <a:srgbClr val="232323"/>
+                </a:solidFill>
+                <a:latin typeface="Calibri"/>
               </a:rPr>
               <a:t>•  Five rules we agree</a:t>
             </a:r>
@@ -8007,7 +8007,7 @@
     <p:bg>
       <p:bgPr>
         <a:solidFill>
-          <a:srgbClr val="F7F2E9"/>
+          <a:srgbClr val="FAF7F0"/>
         </a:solidFill>
         <a:effectLst/>
       </p:bgPr>
@@ -8049,9 +8049,9 @@
             <a:r>
               <a:rPr sz="1000" b="0">
                 <a:solidFill>
-                  <a:srgbClr val="6B6255"/>
-                </a:solidFill>
-                <a:latin typeface="Arial"/>
+                  <a:srgbClr val="232323"/>
+                </a:solidFill>
+                <a:latin typeface="Calibri"/>
               </a:rPr>
               <a:t>M-D1-03   ·   Poster M-P01</a:t>
             </a:r>
@@ -8088,9 +8088,9 @@
             <a:r>
               <a:rPr sz="1000" b="0">
                 <a:solidFill>
-                  <a:srgbClr val="6B6255"/>
-                </a:solidFill>
-                <a:latin typeface="Arial"/>
+                  <a:srgbClr val="232323"/>
+                </a:solidFill>
+                <a:latin typeface="Calibri"/>
               </a:rPr>
               <a:t>Walking With Farmers</a:t>
             </a:r>
@@ -8127,7 +8127,7 @@
             <a:r>
               <a:rPr sz="3800" b="1">
                 <a:solidFill>
-                  <a:srgbClr val="1F4D2B"/>
+                  <a:srgbClr val="232323"/>
                 </a:solidFill>
                 <a:latin typeface="Georgia"/>
               </a:rPr>
@@ -8151,7 +8151,7 @@
             <a:avLst/>
           </a:prstGeom>
           <a:solidFill>
-            <a:srgbClr val="E2D8C4"/>
+            <a:srgbClr val="6E9CC4"/>
           </a:solidFill>
           <a:ln>
             <a:noFill/>
@@ -8210,9 +8210,9 @@
             <a:r>
               <a:rPr sz="2800" b="0">
                 <a:solidFill>
-                  <a:srgbClr val="20190F"/>
-                </a:solidFill>
-                <a:latin typeface="Arial"/>
+                  <a:srgbClr val="232323"/>
+                </a:solidFill>
+                <a:latin typeface="Calibri"/>
               </a:rPr>
               <a:t>•  Visit A or Visit B?</a:t>
             </a:r>
@@ -8226,9 +8226,9 @@
             <a:r>
               <a:rPr sz="2800" b="0">
                 <a:solidFill>
-                  <a:srgbClr val="20190F"/>
-                </a:solidFill>
-                <a:latin typeface="Arial"/>
+                  <a:srgbClr val="232323"/>
+                </a:solidFill>
+                <a:latin typeface="Calibri"/>
               </a:rPr>
               <a:t>•  Which makes you try again?</a:t>
             </a:r>
@@ -8250,11 +8250,11 @@
             <a:avLst/>
           </a:prstGeom>
           <a:solidFill>
-            <a:srgbClr val="FBF6EC"/>
+            <a:srgbClr val="FAF7F0"/>
           </a:solidFill>
           <a:ln w="15875">
             <a:solidFill>
-              <a:srgbClr val="E2D8C4"/>
+              <a:srgbClr val="6E9CC4"/>
             </a:solidFill>
           </a:ln>
           <a:effectLst/>
@@ -8311,9 +8311,9 @@
             <a:r>
               <a:rPr sz="1200" b="1">
                 <a:solidFill>
-                  <a:srgbClr val="C07A1E"/>
-                </a:solidFill>
-                <a:latin typeface="Arial"/>
+                  <a:srgbClr val="D9622B"/>
+                </a:solidFill>
+                <a:latin typeface="Calibri"/>
               </a:rPr>
               <a:t>IMAGE · M-IMG-02 · coming</a:t>
             </a:r>
@@ -8350,7 +8350,7 @@
             <a:r>
               <a:rPr sz="1800" b="1">
                 <a:solidFill>
-                  <a:srgbClr val="1F4D2B"/>
+                  <a:srgbClr val="232323"/>
                 </a:solidFill>
                 <a:latin typeface="Georgia"/>
               </a:rPr>
@@ -8389,9 +8389,9 @@
             <a:r>
               <a:rPr sz="1100" b="0">
                 <a:solidFill>
-                  <a:srgbClr val="20190F"/>
-                </a:solidFill>
-                <a:latin typeface="Arial"/>
+                  <a:srgbClr val="232323"/>
+                </a:solidFill>
+                <a:latin typeface="Calibri"/>
               </a:rPr>
               <a:t>Split 16:9. Left: a person in a cap with a clipboard standing over a seated farmer, pointing at a dry bed; farmer looks down. Right: the mentor kneeling beside the same bed with the farmer, both looking at the soil, farmer talking. Same garden in both halves.</a:t>
             </a:r>
@@ -8412,7 +8412,7 @@
     <p:bg>
       <p:bgPr>
         <a:solidFill>
-          <a:srgbClr val="F7F2E9"/>
+          <a:srgbClr val="FAF7F0"/>
         </a:solidFill>
         <a:effectLst/>
       </p:bgPr>
@@ -8454,9 +8454,9 @@
             <a:r>
               <a:rPr sz="1000" b="0">
                 <a:solidFill>
-                  <a:srgbClr val="6B6255"/>
-                </a:solidFill>
-                <a:latin typeface="Arial"/>
+                  <a:srgbClr val="232323"/>
+                </a:solidFill>
+                <a:latin typeface="Calibri"/>
               </a:rPr>
               <a:t>M-D1-04   ·   Poster M-P01</a:t>
             </a:r>
@@ -8493,9 +8493,9 @@
             <a:r>
               <a:rPr sz="1000" b="0">
                 <a:solidFill>
-                  <a:srgbClr val="6B6255"/>
-                </a:solidFill>
-                <a:latin typeface="Arial"/>
+                  <a:srgbClr val="232323"/>
+                </a:solidFill>
+                <a:latin typeface="Calibri"/>
               </a:rPr>
               <a:t>Walking With Farmers</a:t>
             </a:r>
@@ -8532,7 +8532,7 @@
             <a:r>
               <a:rPr sz="3800" b="1">
                 <a:solidFill>
-                  <a:srgbClr val="1F4D2B"/>
+                  <a:srgbClr val="232323"/>
                 </a:solidFill>
                 <a:latin typeface="Georgia"/>
               </a:rPr>
@@ -8556,7 +8556,7 @@
             <a:avLst/>
           </a:prstGeom>
           <a:solidFill>
-            <a:srgbClr val="E2D8C4"/>
+            <a:srgbClr val="6E9CC4"/>
           </a:solidFill>
           <a:ln>
             <a:noFill/>
@@ -8615,9 +8615,9 @@
             <a:r>
               <a:rPr sz="2800" b="0">
                 <a:solidFill>
-                  <a:srgbClr val="20190F"/>
-                </a:solidFill>
-                <a:latin typeface="Arial"/>
+                  <a:srgbClr val="232323"/>
+                </a:solidFill>
+                <a:latin typeface="Calibri"/>
               </a:rPr>
               <a:t>•  In front: I lead</a:t>
             </a:r>
@@ -8631,9 +8631,9 @@
             <a:r>
               <a:rPr sz="2800" b="0">
                 <a:solidFill>
-                  <a:srgbClr val="20190F"/>
-                </a:solidFill>
-                <a:latin typeface="Arial"/>
+                  <a:srgbClr val="232323"/>
+                </a:solidFill>
+                <a:latin typeface="Calibri"/>
               </a:rPr>
               <a:t>•  Behind: I push</a:t>
             </a:r>
@@ -8647,9 +8647,9 @@
             <a:r>
               <a:rPr sz="2800" b="0">
                 <a:solidFill>
-                  <a:srgbClr val="20190F"/>
-                </a:solidFill>
-                <a:latin typeface="Arial"/>
+                  <a:srgbClr val="232323"/>
+                </a:solidFill>
+                <a:latin typeface="Calibri"/>
               </a:rPr>
               <a:t>•  Beside: we walk</a:t>
             </a:r>
@@ -8671,11 +8671,11 @@
             <a:avLst/>
           </a:prstGeom>
           <a:solidFill>
-            <a:srgbClr val="FBF6EC"/>
+            <a:srgbClr val="FAF7F0"/>
           </a:solidFill>
           <a:ln w="15875">
             <a:solidFill>
-              <a:srgbClr val="E2D8C4"/>
+              <a:srgbClr val="6E9CC4"/>
             </a:solidFill>
           </a:ln>
           <a:effectLst/>
@@ -8732,9 +8732,9 @@
             <a:r>
               <a:rPr sz="1200" b="1">
                 <a:solidFill>
-                  <a:srgbClr val="C07A1E"/>
-                </a:solidFill>
-                <a:latin typeface="Arial"/>
+                  <a:srgbClr val="D9622B"/>
+                </a:solidFill>
+                <a:latin typeface="Calibri"/>
               </a:rPr>
               <a:t>POSTER ART · M-P01-ART · coming</a:t>
             </a:r>
@@ -8771,7 +8771,7 @@
             <a:r>
               <a:rPr sz="1800" b="1">
                 <a:solidFill>
-                  <a:srgbClr val="1F4D2B"/>
+                  <a:srgbClr val="232323"/>
                 </a:solidFill>
                 <a:latin typeface="Georgia"/>
               </a:rPr>
@@ -8810,9 +8810,9 @@
             <a:r>
               <a:rPr sz="1100" b="0">
                 <a:solidFill>
-                  <a:srgbClr val="20190F"/>
-                </a:solidFill>
-                <a:latin typeface="Arial"/>
+                  <a:srgbClr val="232323"/>
+                </a:solidFill>
+                <a:latin typeface="Calibri"/>
               </a:rPr>
               <a:t>Three small scenes stacked on a dirt path between vegetable beds. Top: a person with a clipboard striding ahead, farmer trailing behind, head down (in front). Middle: the same person behind the farmer, pointing and pushing (behind). Bottom, largest and in full colour: mentor and farmer walking side by side, the farmer pointing at a healthy bed, the…</a:t>
             </a:r>
@@ -8833,7 +8833,7 @@
     <p:bg>
       <p:bgPr>
         <a:solidFill>
-          <a:srgbClr val="F7F2E9"/>
+          <a:srgbClr val="FAF7F0"/>
         </a:solidFill>
         <a:effectLst/>
       </p:bgPr>
@@ -8875,9 +8875,9 @@
             <a:r>
               <a:rPr sz="1000" b="0">
                 <a:solidFill>
-                  <a:srgbClr val="6B6255"/>
-                </a:solidFill>
-                <a:latin typeface="Arial"/>
+                  <a:srgbClr val="232323"/>
+                </a:solidFill>
+                <a:latin typeface="Calibri"/>
               </a:rPr>
               <a:t>M-D1-05   ·   Poster M-P02</a:t>
             </a:r>
@@ -8914,9 +8914,9 @@
             <a:r>
               <a:rPr sz="1000" b="0">
                 <a:solidFill>
-                  <a:srgbClr val="6B6255"/>
-                </a:solidFill>
-                <a:latin typeface="Arial"/>
+                  <a:srgbClr val="232323"/>
+                </a:solidFill>
+                <a:latin typeface="Calibri"/>
               </a:rPr>
               <a:t>Walking With Farmers</a:t>
             </a:r>
@@ -8953,7 +8953,7 @@
             <a:r>
               <a:rPr sz="3800" b="1">
                 <a:solidFill>
-                  <a:srgbClr val="1F4D2B"/>
+                  <a:srgbClr val="232323"/>
                 </a:solidFill>
                 <a:latin typeface="Georgia"/>
               </a:rPr>
@@ -8977,7 +8977,7 @@
             <a:avLst/>
           </a:prstGeom>
           <a:solidFill>
-            <a:srgbClr val="E2D8C4"/>
+            <a:srgbClr val="6E9CC4"/>
           </a:solidFill>
           <a:ln>
             <a:noFill/>
@@ -9036,9 +9036,9 @@
             <a:r>
               <a:rPr sz="2400" b="0">
                 <a:solidFill>
-                  <a:srgbClr val="20190F"/>
-                </a:solidFill>
-                <a:latin typeface="Arial"/>
+                  <a:srgbClr val="232323"/>
+                </a:solidFill>
+                <a:latin typeface="Calibri"/>
               </a:rPr>
               <a:t>•  Listen first · real promises only</a:t>
             </a:r>
@@ -9052,9 +9052,9 @@
             <a:r>
               <a:rPr sz="2400" b="0">
                 <a:solidFill>
-                  <a:srgbClr val="20190F"/>
-                </a:solidFill>
-                <a:latin typeface="Arial"/>
+                  <a:srgbClr val="232323"/>
+                </a:solidFill>
+                <a:latin typeface="Calibri"/>
               </a:rPr>
               <a:t>•  Private · no gifts that bind</a:t>
             </a:r>
@@ -9068,9 +9068,9 @@
             <a:r>
               <a:rPr sz="2400" b="0">
                 <a:solidFill>
-                  <a:srgbClr val="20190F"/>
-                </a:solidFill>
-                <a:latin typeface="Arial"/>
+                  <a:srgbClr val="232323"/>
+                </a:solidFill>
+                <a:latin typeface="Calibri"/>
               </a:rPr>
               <a:t>•  Keep people safe</a:t>
             </a:r>
@@ -9092,11 +9092,11 @@
             <a:avLst/>
           </a:prstGeom>
           <a:solidFill>
-            <a:srgbClr val="FBF6EC"/>
+            <a:srgbClr val="FAF7F0"/>
           </a:solidFill>
           <a:ln w="15875">
             <a:solidFill>
-              <a:srgbClr val="E2D8C4"/>
+              <a:srgbClr val="6E9CC4"/>
             </a:solidFill>
           </a:ln>
           <a:effectLst/>
@@ -9153,9 +9153,9 @@
             <a:r>
               <a:rPr sz="1200" b="1">
                 <a:solidFill>
-                  <a:srgbClr val="C07A1E"/>
-                </a:solidFill>
-                <a:latin typeface="Arial"/>
+                  <a:srgbClr val="D9622B"/>
+                </a:solidFill>
+                <a:latin typeface="Calibri"/>
               </a:rPr>
               <a:t>POSTER ART · M-P02-ART · coming</a:t>
             </a:r>
@@ -9192,7 +9192,7 @@
             <a:r>
               <a:rPr sz="1800" b="1">
                 <a:solidFill>
-                  <a:srgbClr val="1F4D2B"/>
+                  <a:srgbClr val="232323"/>
                 </a:solidFill>
                 <a:latin typeface="Georgia"/>
               </a:rPr>
@@ -9231,9 +9231,9 @@
             <a:r>
               <a:rPr sz="1100" b="0">
                 <a:solidFill>
-                  <a:srgbClr val="20190F"/>
-                </a:solidFill>
-                <a:latin typeface="Arial"/>
+                  <a:srgbClr val="232323"/>
+                </a:solidFill>
+                <a:latin typeface="Calibri"/>
               </a:rPr>
               <a:t>An open hand (palm facing viewer) drawn large, each finger with a small round picture above it: an ear; a hand pushing away a box of goods; closed lips with a finger (privacy); a hand politely refusing a live chicken while accepting a cup of tea; a shield over a child and a woman. Warm Paper background, Ochre circles.</a:t>
             </a:r>
@@ -9254,7 +9254,7 @@
     <p:bg>
       <p:bgPr>
         <a:solidFill>
-          <a:srgbClr val="F7F2E9"/>
+          <a:srgbClr val="FAF7F0"/>
         </a:solidFill>
         <a:effectLst/>
       </p:bgPr>
@@ -9296,9 +9296,9 @@
             <a:r>
               <a:rPr sz="1000" b="0">
                 <a:solidFill>
-                  <a:srgbClr val="6B6255"/>
-                </a:solidFill>
-                <a:latin typeface="Arial"/>
+                  <a:srgbClr val="232323"/>
+                </a:solidFill>
+                <a:latin typeface="Calibri"/>
               </a:rPr>
               <a:t>M-D1-06   ·   Poster M-P02</a:t>
             </a:r>
@@ -9335,9 +9335,9 @@
             <a:r>
               <a:rPr sz="1000" b="0">
                 <a:solidFill>
-                  <a:srgbClr val="6B6255"/>
-                </a:solidFill>
-                <a:latin typeface="Arial"/>
+                  <a:srgbClr val="232323"/>
+                </a:solidFill>
+                <a:latin typeface="Calibri"/>
               </a:rPr>
               <a:t>Walking With Farmers</a:t>
             </a:r>
@@ -9359,7 +9359,7 @@
             <a:avLst/>
           </a:prstGeom>
           <a:solidFill>
-            <a:srgbClr val="C07A1E"/>
+            <a:srgbClr val="D9622B"/>
           </a:solidFill>
           <a:ln>
             <a:noFill/>
@@ -9418,9 +9418,9 @@
             <a:r>
               <a:rPr sz="1400" b="1">
                 <a:solidFill>
-                  <a:srgbClr val="F7F2E9"/>
-                </a:solidFill>
-                <a:latin typeface="Arial"/>
+                  <a:srgbClr val="FAF7F0"/>
+                </a:solidFill>
+                <a:latin typeface="Calibri"/>
               </a:rPr>
               <a:t>YOUR TURN</a:t>
             </a:r>
@@ -9457,7 +9457,7 @@
             <a:r>
               <a:rPr sz="3800" b="1">
                 <a:solidFill>
-                  <a:srgbClr val="1F4D2B"/>
+                  <a:srgbClr val="232323"/>
                 </a:solidFill>
                 <a:latin typeface="Georgia"/>
               </a:rPr>
@@ -9481,7 +9481,7 @@
             <a:avLst/>
           </a:prstGeom>
           <a:solidFill>
-            <a:srgbClr val="E2D8C4"/>
+            <a:srgbClr val="6E9CC4"/>
           </a:solidFill>
           <a:ln>
             <a:noFill/>
@@ -9540,9 +9540,9 @@
             <a:r>
               <a:rPr sz="3000" b="1">
                 <a:solidFill>
-                  <a:srgbClr val="20190F"/>
-                </a:solidFill>
-                <a:latin typeface="Arial"/>
+                  <a:srgbClr val="232323"/>
+                </a:solidFill>
+                <a:latin typeface="Calibri"/>
               </a:rPr>
               <a:t>•  One card per group · 8 minutes</a:t>
             </a:r>
@@ -9556,9 +9556,9 @@
             <a:r>
               <a:rPr sz="3000" b="1">
                 <a:solidFill>
-                  <a:srgbClr val="20190F"/>
-                </a:solidFill>
-                <a:latin typeface="Arial"/>
+                  <a:srgbClr val="232323"/>
+                </a:solidFill>
+                <a:latin typeface="Calibri"/>
               </a:rPr>
               <a:t>•  Reporter answers in 1 minute</a:t>
             </a:r>
@@ -9579,7 +9579,7 @@
     <p:bg>
       <p:bgPr>
         <a:solidFill>
-          <a:srgbClr val="F7F2E9"/>
+          <a:srgbClr val="FAF7F0"/>
         </a:solidFill>
         <a:effectLst/>
       </p:bgPr>
@@ -9621,9 +9621,9 @@
             <a:r>
               <a:rPr sz="1000" b="0">
                 <a:solidFill>
-                  <a:srgbClr val="6B6255"/>
-                </a:solidFill>
-                <a:latin typeface="Arial"/>
+                  <a:srgbClr val="232323"/>
+                </a:solidFill>
+                <a:latin typeface="Calibri"/>
               </a:rPr>
               <a:t>M-D1-07   ·   Poster M-P03</a:t>
             </a:r>
@@ -9660,9 +9660,9 @@
             <a:r>
               <a:rPr sz="1000" b="0">
                 <a:solidFill>
-                  <a:srgbClr val="6B6255"/>
-                </a:solidFill>
-                <a:latin typeface="Arial"/>
+                  <a:srgbClr val="232323"/>
+                </a:solidFill>
+                <a:latin typeface="Calibri"/>
               </a:rPr>
               <a:t>Walking With Farmers</a:t>
             </a:r>
@@ -9699,7 +9699,7 @@
             <a:r>
               <a:rPr sz="3800" b="1">
                 <a:solidFill>
-                  <a:srgbClr val="1F4D2B"/>
+                  <a:srgbClr val="232323"/>
                 </a:solidFill>
                 <a:latin typeface="Georgia"/>
               </a:rPr>
@@ -9723,7 +9723,7 @@
             <a:avLst/>
           </a:prstGeom>
           <a:solidFill>
-            <a:srgbClr val="E2D8C4"/>
+            <a:srgbClr val="6E9CC4"/>
           </a:solidFill>
           <a:ln>
             <a:noFill/>
@@ -9782,9 +9782,9 @@
             <a:r>
               <a:rPr sz="2400" b="0">
                 <a:solidFill>
-                  <a:srgbClr val="20190F"/>
-                </a:solidFill>
-                <a:latin typeface="Arial"/>
+                  <a:srgbClr val="232323"/>
+                </a:solidFill>
+                <a:latin typeface="Calibri"/>
               </a:rPr>
               <a:t>•  Ears: let them finish</a:t>
             </a:r>
@@ -9798,9 +9798,9 @@
             <a:r>
               <a:rPr sz="2400" b="0">
                 <a:solidFill>
-                  <a:srgbClr val="20190F"/>
-                </a:solidFill>
-                <a:latin typeface="Arial"/>
+                  <a:srgbClr val="232323"/>
+                </a:solidFill>
+                <a:latin typeface="Calibri"/>
               </a:rPr>
               <a:t>•  Eyes: same level, phone away</a:t>
             </a:r>
@@ -9814,9 +9814,9 @@
             <a:r>
               <a:rPr sz="2400" b="0">
                 <a:solidFill>
-                  <a:srgbClr val="20190F"/>
-                </a:solidFill>
-                <a:latin typeface="Arial"/>
+                  <a:srgbClr val="232323"/>
+                </a:solidFill>
+                <a:latin typeface="Calibri"/>
               </a:rPr>
               <a:t>•  Heart: notice feelings · say it back</a:t>
             </a:r>
@@ -9838,11 +9838,11 @@
             <a:avLst/>
           </a:prstGeom>
           <a:solidFill>
-            <a:srgbClr val="FBF6EC"/>
+            <a:srgbClr val="FAF7F0"/>
           </a:solidFill>
           <a:ln w="15875">
             <a:solidFill>
-              <a:srgbClr val="E2D8C4"/>
+              <a:srgbClr val="6E9CC4"/>
             </a:solidFill>
           </a:ln>
           <a:effectLst/>
@@ -9899,9 +9899,9 @@
             <a:r>
               <a:rPr sz="1200" b="1">
                 <a:solidFill>
-                  <a:srgbClr val="C07A1E"/>
-                </a:solidFill>
-                <a:latin typeface="Arial"/>
+                  <a:srgbClr val="D9622B"/>
+                </a:solidFill>
+                <a:latin typeface="Calibri"/>
               </a:rPr>
               <a:t>POSTER ART · M-P03-ART · coming</a:t>
             </a:r>
@@ -9938,7 +9938,7 @@
             <a:r>
               <a:rPr sz="1800" b="1">
                 <a:solidFill>
-                  <a:srgbClr val="1F4D2B"/>
+                  <a:srgbClr val="232323"/>
                 </a:solidFill>
                 <a:latin typeface="Georgia"/>
               </a:rPr>
@@ -9977,9 +9977,9 @@
             <a:r>
               <a:rPr sz="1100" b="0">
                 <a:solidFill>
-                  <a:srgbClr val="20190F"/>
-                </a:solidFill>
-                <a:latin typeface="Arial"/>
+                  <a:srgbClr val="232323"/>
+                </a:solidFill>
+                <a:latin typeface="Calibri"/>
               </a:rPr>
               <a:t>The mentor squatting at the same level as the gogo farmer who sits on an upturned 20 ℓ drum beside a bed. The mentor's phone is in her bag (visible, put away). The gogo is talking with open hands; the mentor nods. Three soft Ochre circles highlight the mentor's ear, her eyes (looking at the bed the gogo points to), and her hand on her chest.</a:t>
             </a:r>
@@ -10000,7 +10000,7 @@
     <p:bg>
       <p:bgPr>
         <a:solidFill>
-          <a:srgbClr val="F7F2E9"/>
+          <a:srgbClr val="FAF7F0"/>
         </a:solidFill>
         <a:effectLst/>
       </p:bgPr>
@@ -10042,9 +10042,9 @@
             <a:r>
               <a:rPr sz="1000" b="0">
                 <a:solidFill>
-                  <a:srgbClr val="6B6255"/>
-                </a:solidFill>
-                <a:latin typeface="Arial"/>
+                  <a:srgbClr val="232323"/>
+                </a:solidFill>
+                <a:latin typeface="Calibri"/>
               </a:rPr>
               <a:t>M-D1-08   ·   Poster M-P03</a:t>
             </a:r>
@@ -10081,9 +10081,9 @@
             <a:r>
               <a:rPr sz="1000" b="0">
                 <a:solidFill>
-                  <a:srgbClr val="6B6255"/>
-                </a:solidFill>
-                <a:latin typeface="Arial"/>
+                  <a:srgbClr val="232323"/>
+                </a:solidFill>
+                <a:latin typeface="Calibri"/>
               </a:rPr>
               <a:t>Walking With Farmers</a:t>
             </a:r>
@@ -10105,7 +10105,7 @@
             <a:avLst/>
           </a:prstGeom>
           <a:solidFill>
-            <a:srgbClr val="C07A1E"/>
+            <a:srgbClr val="D9622B"/>
           </a:solidFill>
           <a:ln>
             <a:noFill/>
@@ -10164,9 +10164,9 @@
             <a:r>
               <a:rPr sz="1400" b="1">
                 <a:solidFill>
-                  <a:srgbClr val="F7F2E9"/>
-                </a:solidFill>
-                <a:latin typeface="Arial"/>
+                  <a:srgbClr val="FAF7F0"/>
+                </a:solidFill>
+                <a:latin typeface="Calibri"/>
               </a:rPr>
               <a:t>YOUR TURN</a:t>
             </a:r>
@@ -10203,7 +10203,7 @@
             <a:r>
               <a:rPr sz="3800" b="1">
                 <a:solidFill>
-                  <a:srgbClr val="1F4D2B"/>
+                  <a:srgbClr val="232323"/>
                 </a:solidFill>
                 <a:latin typeface="Georgia"/>
               </a:rPr>
@@ -10227,7 +10227,7 @@
             <a:avLst/>
           </a:prstGeom>
           <a:solidFill>
-            <a:srgbClr val="E2D8C4"/>
+            <a:srgbClr val="6E9CC4"/>
           </a:solidFill>
           <a:ln>
             <a:noFill/>
@@ -10286,9 +10286,9 @@
             <a:r>
               <a:rPr sz="3000" b="1">
                 <a:solidFill>
-                  <a:srgbClr val="20190F"/>
-                </a:solidFill>
-                <a:latin typeface="Arial"/>
+                  <a:srgbClr val="232323"/>
+                </a:solidFill>
+                <a:latin typeface="Calibri"/>
               </a:rPr>
               <a:t>•  Speaker · Listener · Observer</a:t>
             </a:r>
@@ -10302,9 +10302,9 @@
             <a:r>
               <a:rPr sz="3000" b="1">
                 <a:solidFill>
-                  <a:srgbClr val="20190F"/>
-                </a:solidFill>
-                <a:latin typeface="Arial"/>
+                  <a:srgbClr val="232323"/>
+                </a:solidFill>
+                <a:latin typeface="Calibri"/>
               </a:rPr>
               <a:t>•  5 min talk + 3 min feedback</a:t>
             </a:r>
@@ -10318,9 +10318,9 @@
             <a:r>
               <a:rPr sz="3000" b="1">
                 <a:solidFill>
-                  <a:srgbClr val="20190F"/>
-                </a:solidFill>
-                <a:latin typeface="Arial"/>
+                  <a:srgbClr val="232323"/>
+                </a:solidFill>
+                <a:latin typeface="Calibri"/>
               </a:rPr>
               <a:t>•  Rotate 3 times</a:t>
             </a:r>
@@ -10342,11 +10342,11 @@
             <a:avLst/>
           </a:prstGeom>
           <a:solidFill>
-            <a:srgbClr val="FBF6EC"/>
+            <a:srgbClr val="FAF7F0"/>
           </a:solidFill>
           <a:ln w="15875">
             <a:solidFill>
-              <a:srgbClr val="E2D8C4"/>
+              <a:srgbClr val="6E9CC4"/>
             </a:solidFill>
           </a:ln>
           <a:effectLst/>
@@ -10403,9 +10403,9 @@
             <a:r>
               <a:rPr sz="1200" b="1">
                 <a:solidFill>
-                  <a:srgbClr val="C07A1E"/>
-                </a:solidFill>
-                <a:latin typeface="Arial"/>
+                  <a:srgbClr val="D9622B"/>
+                </a:solidFill>
+                <a:latin typeface="Calibri"/>
               </a:rPr>
               <a:t>IMAGE · M-IMG-03 · coming</a:t>
             </a:r>
@@ -10442,7 +10442,7 @@
             <a:r>
               <a:rPr sz="1800" b="1">
                 <a:solidFill>
-                  <a:srgbClr val="1F4D2B"/>
+                  <a:srgbClr val="232323"/>
                 </a:solidFill>
                 <a:latin typeface="Georgia"/>
               </a:rPr>
@@ -10481,9 +10481,9 @@
             <a:r>
               <a:rPr sz="1100" b="0">
                 <a:solidFill>
-                  <a:srgbClr val="20190F"/>
-                </a:solidFill>
-                <a:latin typeface="Arial"/>
+                  <a:srgbClr val="232323"/>
+                </a:solidFill>
+                <a:latin typeface="Calibri"/>
               </a:rPr>
               <a:t>Three adults sitting on plastic chairs under a tree: one talking with open hands, one leaning in listening, one a little apart with a clipboard (blank sheet) watching. Mixed ages and genders. 16:9.</a:t>
             </a:r>
@@ -10504,7 +10504,7 @@
     <p:bg>
       <p:bgPr>
         <a:solidFill>
-          <a:srgbClr val="F7F2E9"/>
+          <a:srgbClr val="FAF7F0"/>
         </a:solidFill>
         <a:effectLst/>
       </p:bgPr>
@@ -10546,9 +10546,9 @@
             <a:r>
               <a:rPr sz="1000" b="0">
                 <a:solidFill>
-                  <a:srgbClr val="6B6255"/>
-                </a:solidFill>
-                <a:latin typeface="Arial"/>
+                  <a:srgbClr val="232323"/>
+                </a:solidFill>
+                <a:latin typeface="Calibri"/>
               </a:rPr>
               <a:t>M-D1-09   ·   Poster M-P04</a:t>
             </a:r>
@@ -10585,9 +10585,9 @@
             <a:r>
               <a:rPr sz="1000" b="0">
                 <a:solidFill>
-                  <a:srgbClr val="6B6255"/>
-                </a:solidFill>
-                <a:latin typeface="Arial"/>
+                  <a:srgbClr val="232323"/>
+                </a:solidFill>
+                <a:latin typeface="Calibri"/>
               </a:rPr>
               <a:t>Walking With Farmers</a:t>
             </a:r>
@@ -10624,7 +10624,7 @@
             <a:r>
               <a:rPr sz="3800" b="1">
                 <a:solidFill>
-                  <a:srgbClr val="1F4D2B"/>
+                  <a:srgbClr val="232323"/>
                 </a:solidFill>
                 <a:latin typeface="Georgia"/>
               </a:rPr>
@@ -10648,7 +10648,7 @@
             <a:avLst/>
           </a:prstGeom>
           <a:solidFill>
-            <a:srgbClr val="E2D8C4"/>
+            <a:srgbClr val="6E9CC4"/>
           </a:solidFill>
           <a:ln>
             <a:noFill/>
@@ -10707,9 +10707,9 @@
             <a:r>
               <a:rPr sz="2800" b="0">
                 <a:solidFill>
-                  <a:srgbClr val="20190F"/>
-                </a:solidFill>
-                <a:latin typeface="Arial"/>
+                  <a:srgbClr val="232323"/>
+                </a:solidFill>
+                <a:latin typeface="Calibri"/>
               </a:rPr>
               <a:t>•  Closed → Open → Deeper</a:t>
             </a:r>
@@ -10723,9 +10723,9 @@
             <a:r>
               <a:rPr sz="2800" b="0">
                 <a:solidFill>
-                  <a:srgbClr val="20190F"/>
-                </a:solidFill>
-                <a:latin typeface="Arial"/>
+                  <a:srgbClr val="232323"/>
+                </a:solidFill>
+                <a:latin typeface="Calibri"/>
               </a:rPr>
               <a:t>•  → The farmer's own plan</a:t>
             </a:r>
@@ -10739,9 +10739,9 @@
             <a:r>
               <a:rPr sz="2800" b="0">
                 <a:solidFill>
-                  <a:srgbClr val="20190F"/>
-                </a:solidFill>
-                <a:latin typeface="Arial"/>
+                  <a:srgbClr val="232323"/>
+                </a:solidFill>
+                <a:latin typeface="Calibri"/>
               </a:rPr>
               <a:t>•  "What else?"</a:t>
             </a:r>
@@ -10763,11 +10763,11 @@
             <a:avLst/>
           </a:prstGeom>
           <a:solidFill>
-            <a:srgbClr val="FBF6EC"/>
+            <a:srgbClr val="FAF7F0"/>
           </a:solidFill>
           <a:ln w="15875">
             <a:solidFill>
-              <a:srgbClr val="E2D8C4"/>
+              <a:srgbClr val="6E9CC4"/>
             </a:solidFill>
           </a:ln>
           <a:effectLst/>
@@ -10824,9 +10824,9 @@
             <a:r>
               <a:rPr sz="1200" b="1">
                 <a:solidFill>
-                  <a:srgbClr val="C07A1E"/>
-                </a:solidFill>
-                <a:latin typeface="Arial"/>
+                  <a:srgbClr val="D9622B"/>
+                </a:solidFill>
+                <a:latin typeface="Calibri"/>
               </a:rPr>
               <a:t>POSTER ART · M-P04-ART · coming</a:t>
             </a:r>
@@ -10863,7 +10863,7 @@
             <a:r>
               <a:rPr sz="1800" b="1">
                 <a:solidFill>
-                  <a:srgbClr val="1F4D2B"/>
+                  <a:srgbClr val="232323"/>
                 </a:solidFill>
                 <a:latin typeface="Georgia"/>
               </a:rPr>
@@ -10902,9 +10902,9 @@
             <a:r>
               <a:rPr sz="1100" b="0">
                 <a:solidFill>
-                  <a:srgbClr val="20190F"/>
-                </a:solidFill>
-                <a:latin typeface="Arial"/>
+                  <a:srgbClr val="232323"/>
+                </a:solidFill>
+                <a:latin typeface="Calibri"/>
               </a:rPr>
               <a:t>A wooden ladder leaning against a fruit tree. On the bottom rung the farmer stands with arms folded; on each higher rung the farmer climbs higher, looking more engaged; at the top the farmer is reaching for a ripe fruit with a smile. The mentor steadies the ladder at the bottom. Four rungs highlighted with Ochre numbers.</a:t>
             </a:r>
